--- a/material/5_AI/02_AI 학습을 위한 기초 수학.pptx
+++ b/material/5_AI/02_AI 학습을 위한 기초 수학.pptx
@@ -8,7 +8,7 @@
     <p:notesMasterId r:id="rId15"/>
   </p:notesMasterIdLst>
   <p:sldIdLst>
-    <p:sldId id="1004" r:id="rId2"/>
+    <p:sldId id="1017" r:id="rId2"/>
     <p:sldId id="677" r:id="rId3"/>
     <p:sldId id="1015" r:id="rId4"/>
     <p:sldId id="563" r:id="rId5"/>
@@ -251,7 +251,7 @@
           <a:p>
             <a:fld id="{2EF3F159-7250-4DD4-91C2-13B35D56E1AF}" type="datetimeFigureOut">
               <a:rPr lang="ko-KR" altLang="en-US" smtClean="0"/>
-              <a:t>2026-01-06</a:t>
+              <a:t>2026-01-07</a:t>
             </a:fld>
             <a:endParaRPr lang="ko-KR" altLang="en-US"/>
           </a:p>
@@ -953,7 +953,7 @@
           <a:p>
             <a:fld id="{9D9DC021-A0A2-48FA-9844-867A974E57AD}" type="datetime1">
               <a:rPr lang="ko-KR" altLang="en-US" smtClean="0"/>
-              <a:t>2026-01-06</a:t>
+              <a:t>2026-01-07</a:t>
             </a:fld>
             <a:endParaRPr lang="ko-KR" altLang="en-US"/>
           </a:p>
@@ -1240,7 +1240,7 @@
           <a:p>
             <a:fld id="{06873DC6-58A2-4EA5-A212-0B6ECD61FDC0}" type="datetime1">
               <a:rPr lang="ko-KR" altLang="en-US" smtClean="0"/>
-              <a:t>2026-01-06</a:t>
+              <a:t>2026-01-07</a:t>
             </a:fld>
             <a:endParaRPr lang="ko-KR" altLang="en-US"/>
           </a:p>
@@ -1415,7 +1415,7 @@
           <a:p>
             <a:fld id="{CECFA89F-766A-4215-9646-99A19D814B36}" type="datetime1">
               <a:rPr lang="ko-KR" altLang="en-US" smtClean="0"/>
-              <a:t>2026-01-06</a:t>
+              <a:t>2026-01-07</a:t>
             </a:fld>
             <a:endParaRPr lang="ko-KR" altLang="en-US"/>
           </a:p>
@@ -1745,7 +1745,7 @@
           <a:p>
             <a:fld id="{CECFA89F-766A-4215-9646-99A19D814B36}" type="datetime1">
               <a:rPr lang="ko-KR" altLang="en-US" smtClean="0"/>
-              <a:t>2026-01-06</a:t>
+              <a:t>2026-01-07</a:t>
             </a:fld>
             <a:endParaRPr lang="ko-KR" altLang="en-US"/>
           </a:p>
@@ -2322,105 +2322,6 @@
           </a:p>
         </p:txBody>
       </p:sp>
-      <p:sp>
-        <p:nvSpPr>
-          <p:cNvPr id="3" name="부제목 2">
-            <a:extLst>
-              <a:ext uri="{FF2B5EF4-FFF2-40B4-BE49-F238E27FC236}">
-                <a16:creationId xmlns:a16="http://schemas.microsoft.com/office/drawing/2014/main" id="{5F9E2036-8D3D-3C48-304C-6615D19E477C}"/>
-              </a:ext>
-            </a:extLst>
-          </p:cNvPr>
-          <p:cNvSpPr>
-            <a:spLocks noGrp="1"/>
-          </p:cNvSpPr>
-          <p:nvPr>
-            <p:ph type="subTitle" idx="1"/>
-          </p:nvPr>
-        </p:nvSpPr>
-        <p:spPr>
-          <a:xfrm>
-            <a:off x="6375349" y="3686684"/>
-            <a:ext cx="2336503" cy="530087"/>
-          </a:xfrm>
-        </p:spPr>
-        <p:txBody>
-          <a:bodyPr wrap="square"/>
-          <a:lstStyle/>
-          <a:p>
-            <a:pPr algn="just"/>
-            <a:r>
-              <a:rPr lang="ko-KR" altLang="en-US" b="1" dirty="0">
-                <a:solidFill>
-                  <a:srgbClr val="2B2B2B"/>
-                </a:solidFill>
-                <a:latin typeface="G마켓 산스 TTF Bold" panose="02000000000000000000" pitchFamily="2" charset="-127"/>
-                <a:ea typeface="G마켓 산스 TTF Bold" panose="02000000000000000000" pitchFamily="2" charset="-127"/>
-                <a:cs typeface="Pretendard SemiBold" panose="02000703000000020004" pitchFamily="2" charset="-127"/>
-              </a:rPr>
-              <a:t>재생에너지 </a:t>
-            </a:r>
-            <a:r>
-              <a:rPr lang="en-US" altLang="ko-KR" b="1" dirty="0">
-                <a:solidFill>
-                  <a:srgbClr val="2B2B2B"/>
-                </a:solidFill>
-                <a:latin typeface="G마켓 산스 TTF Bold" panose="02000000000000000000" pitchFamily="2" charset="-127"/>
-                <a:ea typeface="G마켓 산스 TTF Bold" panose="02000000000000000000" pitchFamily="2" charset="-127"/>
-                <a:cs typeface="Pretendard SemiBold" panose="02000703000000020004" pitchFamily="2" charset="-127"/>
-              </a:rPr>
-              <a:t>3</a:t>
-            </a:r>
-            <a:r>
-              <a:rPr lang="ko-KR" altLang="en-US" b="1" dirty="0">
-                <a:solidFill>
-                  <a:srgbClr val="2B2B2B"/>
-                </a:solidFill>
-                <a:latin typeface="G마켓 산스 TTF Bold" panose="02000000000000000000" pitchFamily="2" charset="-127"/>
-                <a:ea typeface="G마켓 산스 TTF Bold" panose="02000000000000000000" pitchFamily="2" charset="-127"/>
-                <a:cs typeface="Pretendard SemiBold" panose="02000703000000020004" pitchFamily="2" charset="-127"/>
-              </a:rPr>
-              <a:t>기</a:t>
-            </a:r>
-          </a:p>
-        </p:txBody>
-      </p:sp>
-      <p:pic>
-        <p:nvPicPr>
-          <p:cNvPr id="4" name="그림 3">
-            <a:extLst>
-              <a:ext uri="{FF2B5EF4-FFF2-40B4-BE49-F238E27FC236}">
-                <a16:creationId xmlns:a16="http://schemas.microsoft.com/office/drawing/2014/main" id="{73AD1B1D-CD7D-EE4E-41B0-87A1CCAAD46F}"/>
-              </a:ext>
-            </a:extLst>
-          </p:cNvPr>
-          <p:cNvPicPr>
-            <a:picLocks noChangeAspect="1"/>
-          </p:cNvPicPr>
-          <p:nvPr/>
-        </p:nvPicPr>
-        <p:blipFill>
-          <a:blip r:embed="rId3">
-            <a:extLst>
-              <a:ext uri="{28A0092B-C50C-407E-A947-70E740481C1C}">
-                <a14:useLocalDpi xmlns:a14="http://schemas.microsoft.com/office/drawing/2010/main" val="0"/>
-              </a:ext>
-            </a:extLst>
-          </a:blip>
-          <a:stretch>
-            <a:fillRect/>
-          </a:stretch>
-        </p:blipFill>
-        <p:spPr>
-          <a:xfrm>
-            <a:off x="3229511" y="3670957"/>
-            <a:ext cx="3021223" cy="456225"/>
-          </a:xfrm>
-          <a:prstGeom prst="rect">
-            <a:avLst/>
-          </a:prstGeom>
-        </p:spPr>
-      </p:pic>
       <p:grpSp>
         <p:nvGrpSpPr>
           <p:cNvPr id="5" name="그룹 4">
@@ -2456,7 +2357,7 @@
             <p:nvPr/>
           </p:nvPicPr>
           <p:blipFill>
-            <a:blip r:embed="rId4">
+            <a:blip r:embed="rId3">
               <a:extLst>
                 <a:ext uri="{28A0092B-C50C-407E-A947-70E740481C1C}">
                   <a14:useLocalDpi xmlns:a14="http://schemas.microsoft.com/office/drawing/2010/main" val="0"/>
@@ -2492,7 +2393,7 @@
             <p:nvPr/>
           </p:nvPicPr>
           <p:blipFill>
-            <a:blip r:embed="rId5" cstate="print">
+            <a:blip r:embed="rId4" cstate="print">
               <a:extLst>
                 <a:ext uri="{28A0092B-C50C-407E-A947-70E740481C1C}">
                   <a14:useLocalDpi xmlns:a14="http://schemas.microsoft.com/office/drawing/2010/main" val="0"/>
@@ -2514,10 +2415,275 @@
           </p:spPr>
         </p:pic>
       </p:grpSp>
+      <p:sp>
+        <p:nvSpPr>
+          <p:cNvPr id="8" name="부제목 2">
+            <a:extLst>
+              <a:ext uri="{FF2B5EF4-FFF2-40B4-BE49-F238E27FC236}">
+                <a16:creationId xmlns:a16="http://schemas.microsoft.com/office/drawing/2014/main" id="{DB4B2667-B3F4-F4E7-4A87-A3477312E2B1}"/>
+              </a:ext>
+            </a:extLst>
+          </p:cNvPr>
+          <p:cNvSpPr txBox="1">
+            <a:spLocks/>
+          </p:cNvSpPr>
+          <p:nvPr/>
+        </p:nvSpPr>
+        <p:spPr>
+          <a:xfrm>
+            <a:off x="5194406" y="3686684"/>
+            <a:ext cx="4316585" cy="530087"/>
+          </a:xfrm>
+          <a:prstGeom prst="rect">
+            <a:avLst/>
+          </a:prstGeom>
+        </p:spPr>
+        <p:txBody>
+          <a:bodyPr vert="horz" wrap="square" lIns="91440" tIns="45720" rIns="91440" bIns="45720" rtlCol="0">
+            <a:normAutofit fontScale="85000" lnSpcReduction="10000"/>
+          </a:bodyPr>
+          <a:lstStyle>
+            <a:lvl1pPr marL="0" indent="0" algn="ctr" defTabSz="914400" rtl="0" eaLnBrk="1" latinLnBrk="1" hangingPunct="1">
+              <a:lnSpc>
+                <a:spcPct val="90000"/>
+              </a:lnSpc>
+              <a:spcBef>
+                <a:spcPts val="1000"/>
+              </a:spcBef>
+              <a:buFont typeface="Arial" panose="020B0604020202020204" pitchFamily="34" charset="0"/>
+              <a:buNone/>
+              <a:defRPr sz="2400" kern="1200">
+                <a:solidFill>
+                  <a:schemeClr val="tx1"/>
+                </a:solidFill>
+                <a:latin typeface="Pretendard Medium" panose="02000603000000020004" pitchFamily="2" charset="-127"/>
+                <a:ea typeface="Pretendard Medium" panose="02000603000000020004" pitchFamily="2" charset="-127"/>
+                <a:cs typeface="Pretendard Medium" panose="02000603000000020004" pitchFamily="2" charset="-127"/>
+              </a:defRPr>
+            </a:lvl1pPr>
+            <a:lvl2pPr marL="457200" indent="0" algn="ctr" defTabSz="914400" rtl="0" eaLnBrk="1" latinLnBrk="1" hangingPunct="1">
+              <a:lnSpc>
+                <a:spcPct val="90000"/>
+              </a:lnSpc>
+              <a:spcBef>
+                <a:spcPts val="500"/>
+              </a:spcBef>
+              <a:buFont typeface="Arial" panose="020B0604020202020204" pitchFamily="34" charset="0"/>
+              <a:buNone/>
+              <a:defRPr sz="2000" kern="1200">
+                <a:solidFill>
+                  <a:schemeClr val="tx1"/>
+                </a:solidFill>
+                <a:latin typeface="Pretendard Light" panose="02000403000000020004" pitchFamily="2" charset="-127"/>
+                <a:ea typeface="Pretendard Light" panose="02000403000000020004" pitchFamily="2" charset="-127"/>
+                <a:cs typeface="Pretendard Light" panose="02000403000000020004" pitchFamily="2" charset="-127"/>
+              </a:defRPr>
+            </a:lvl2pPr>
+            <a:lvl3pPr marL="914400" indent="0" algn="ctr" defTabSz="914400" rtl="0" eaLnBrk="1" latinLnBrk="1" hangingPunct="1">
+              <a:lnSpc>
+                <a:spcPct val="90000"/>
+              </a:lnSpc>
+              <a:spcBef>
+                <a:spcPts val="500"/>
+              </a:spcBef>
+              <a:buFont typeface="Arial" panose="020B0604020202020204" pitchFamily="34" charset="0"/>
+              <a:buNone/>
+              <a:defRPr sz="1800" kern="1200">
+                <a:solidFill>
+                  <a:schemeClr val="tx1"/>
+                </a:solidFill>
+                <a:latin typeface="Pretendard Light" panose="02000403000000020004" pitchFamily="2" charset="-127"/>
+                <a:ea typeface="Pretendard Light" panose="02000403000000020004" pitchFamily="2" charset="-127"/>
+                <a:cs typeface="Pretendard Light" panose="02000403000000020004" pitchFamily="2" charset="-127"/>
+              </a:defRPr>
+            </a:lvl3pPr>
+            <a:lvl4pPr marL="1371600" indent="0" algn="ctr" defTabSz="914400" rtl="0" eaLnBrk="1" latinLnBrk="1" hangingPunct="1">
+              <a:lnSpc>
+                <a:spcPct val="90000"/>
+              </a:lnSpc>
+              <a:spcBef>
+                <a:spcPts val="500"/>
+              </a:spcBef>
+              <a:buFont typeface="Arial" panose="020B0604020202020204" pitchFamily="34" charset="0"/>
+              <a:buNone/>
+              <a:defRPr sz="1600" kern="1200">
+                <a:solidFill>
+                  <a:schemeClr val="tx1"/>
+                </a:solidFill>
+                <a:latin typeface="Pretendard Light" panose="02000403000000020004" pitchFamily="2" charset="-127"/>
+                <a:ea typeface="Pretendard Light" panose="02000403000000020004" pitchFamily="2" charset="-127"/>
+                <a:cs typeface="Pretendard Light" panose="02000403000000020004" pitchFamily="2" charset="-127"/>
+              </a:defRPr>
+            </a:lvl4pPr>
+            <a:lvl5pPr marL="1828800" indent="0" algn="ctr" defTabSz="914400" rtl="0" eaLnBrk="1" latinLnBrk="1" hangingPunct="1">
+              <a:lnSpc>
+                <a:spcPct val="90000"/>
+              </a:lnSpc>
+              <a:spcBef>
+                <a:spcPts val="500"/>
+              </a:spcBef>
+              <a:buFont typeface="Arial" panose="020B0604020202020204" pitchFamily="34" charset="0"/>
+              <a:buNone/>
+              <a:defRPr sz="1600" kern="1200">
+                <a:solidFill>
+                  <a:schemeClr val="tx1"/>
+                </a:solidFill>
+                <a:latin typeface="Pretendard Light" panose="02000403000000020004" pitchFamily="2" charset="-127"/>
+                <a:ea typeface="Pretendard Light" panose="02000403000000020004" pitchFamily="2" charset="-127"/>
+                <a:cs typeface="Pretendard Light" panose="02000403000000020004" pitchFamily="2" charset="-127"/>
+              </a:defRPr>
+            </a:lvl5pPr>
+            <a:lvl6pPr marL="2286000" indent="0" algn="ctr" defTabSz="914400" rtl="0" eaLnBrk="1" latinLnBrk="1" hangingPunct="1">
+              <a:lnSpc>
+                <a:spcPct val="90000"/>
+              </a:lnSpc>
+              <a:spcBef>
+                <a:spcPts val="500"/>
+              </a:spcBef>
+              <a:buFont typeface="Arial" panose="020B0604020202020204" pitchFamily="34" charset="0"/>
+              <a:buNone/>
+              <a:defRPr sz="1600" kern="1200">
+                <a:solidFill>
+                  <a:schemeClr val="tx1"/>
+                </a:solidFill>
+                <a:latin typeface="+mn-lt"/>
+                <a:ea typeface="+mn-ea"/>
+                <a:cs typeface="+mn-cs"/>
+              </a:defRPr>
+            </a:lvl6pPr>
+            <a:lvl7pPr marL="2743200" indent="0" algn="ctr" defTabSz="914400" rtl="0" eaLnBrk="1" latinLnBrk="1" hangingPunct="1">
+              <a:lnSpc>
+                <a:spcPct val="90000"/>
+              </a:lnSpc>
+              <a:spcBef>
+                <a:spcPts val="500"/>
+              </a:spcBef>
+              <a:buFont typeface="Arial" panose="020B0604020202020204" pitchFamily="34" charset="0"/>
+              <a:buNone/>
+              <a:defRPr sz="1600" kern="1200">
+                <a:solidFill>
+                  <a:schemeClr val="tx1"/>
+                </a:solidFill>
+                <a:latin typeface="+mn-lt"/>
+                <a:ea typeface="+mn-ea"/>
+                <a:cs typeface="+mn-cs"/>
+              </a:defRPr>
+            </a:lvl7pPr>
+            <a:lvl8pPr marL="3200400" indent="0" algn="ctr" defTabSz="914400" rtl="0" eaLnBrk="1" latinLnBrk="1" hangingPunct="1">
+              <a:lnSpc>
+                <a:spcPct val="90000"/>
+              </a:lnSpc>
+              <a:spcBef>
+                <a:spcPts val="500"/>
+              </a:spcBef>
+              <a:buFont typeface="Arial" panose="020B0604020202020204" pitchFamily="34" charset="0"/>
+              <a:buNone/>
+              <a:defRPr sz="1600" kern="1200">
+                <a:solidFill>
+                  <a:schemeClr val="tx1"/>
+                </a:solidFill>
+                <a:latin typeface="+mn-lt"/>
+                <a:ea typeface="+mn-ea"/>
+                <a:cs typeface="+mn-cs"/>
+              </a:defRPr>
+            </a:lvl8pPr>
+            <a:lvl9pPr marL="3657600" indent="0" algn="ctr" defTabSz="914400" rtl="0" eaLnBrk="1" latinLnBrk="1" hangingPunct="1">
+              <a:lnSpc>
+                <a:spcPct val="90000"/>
+              </a:lnSpc>
+              <a:spcBef>
+                <a:spcPts val="500"/>
+              </a:spcBef>
+              <a:buFont typeface="Arial" panose="020B0604020202020204" pitchFamily="34" charset="0"/>
+              <a:buNone/>
+              <a:defRPr sz="1600" kern="1200">
+                <a:solidFill>
+                  <a:schemeClr val="tx1"/>
+                </a:solidFill>
+                <a:latin typeface="+mn-lt"/>
+                <a:ea typeface="+mn-ea"/>
+                <a:cs typeface="+mn-cs"/>
+              </a:defRPr>
+            </a:lvl9pPr>
+          </a:lstStyle>
+          <a:p>
+            <a:pPr algn="just"/>
+            <a:r>
+              <a:rPr lang="ko-KR" altLang="en-US" b="1" dirty="0">
+                <a:solidFill>
+                  <a:srgbClr val="2B2B2B"/>
+                </a:solidFill>
+                <a:latin typeface="G마켓 산스 TTF Bold" panose="02000000000000000000" pitchFamily="2" charset="-127"/>
+                <a:ea typeface="G마켓 산스 TTF Bold" panose="02000000000000000000" pitchFamily="2" charset="-127"/>
+                <a:cs typeface="Pretendard SemiBold" panose="02000703000000020004" pitchFamily="2" charset="-127"/>
+              </a:rPr>
+              <a:t>신재생에너지 </a:t>
+            </a:r>
+            <a:r>
+              <a:rPr lang="en-US" altLang="ko-KR" b="1" dirty="0">
+                <a:solidFill>
+                  <a:srgbClr val="2B2B2B"/>
+                </a:solidFill>
+                <a:latin typeface="G마켓 산스 TTF Bold" panose="02000000000000000000" pitchFamily="2" charset="-127"/>
+                <a:ea typeface="G마켓 산스 TTF Bold" panose="02000000000000000000" pitchFamily="2" charset="-127"/>
+                <a:cs typeface="Pretendard SemiBold" panose="02000703000000020004" pitchFamily="2" charset="-127"/>
+              </a:rPr>
+              <a:t>IoT </a:t>
+            </a:r>
+            <a:r>
+              <a:rPr lang="ko-KR" altLang="en-US" b="1" dirty="0">
+                <a:solidFill>
+                  <a:srgbClr val="2B2B2B"/>
+                </a:solidFill>
+                <a:latin typeface="G마켓 산스 TTF Bold" panose="02000000000000000000" pitchFamily="2" charset="-127"/>
+                <a:ea typeface="G마켓 산스 TTF Bold" panose="02000000000000000000" pitchFamily="2" charset="-127"/>
+                <a:cs typeface="Pretendard SemiBold" panose="02000703000000020004" pitchFamily="2" charset="-127"/>
+              </a:rPr>
+              <a:t>개발자 입문 과정</a:t>
+            </a:r>
+          </a:p>
+        </p:txBody>
+      </p:sp>
+      <p:pic>
+        <p:nvPicPr>
+          <p:cNvPr id="11" name="그림 10">
+            <a:extLst>
+              <a:ext uri="{FF2B5EF4-FFF2-40B4-BE49-F238E27FC236}">
+                <a16:creationId xmlns:a16="http://schemas.microsoft.com/office/drawing/2014/main" id="{43B0D367-DE04-26A9-6CB6-502ED4BB2FD3}"/>
+              </a:ext>
+            </a:extLst>
+          </p:cNvPr>
+          <p:cNvPicPr>
+            <a:picLocks noChangeAspect="1"/>
+          </p:cNvPicPr>
+          <p:nvPr/>
+        </p:nvPicPr>
+        <p:blipFill>
+          <a:blip r:embed="rId5">
+            <a:extLst>
+              <a:ext uri="{28A0092B-C50C-407E-A947-70E740481C1C}">
+                <a14:useLocalDpi xmlns:a14="http://schemas.microsoft.com/office/drawing/2010/main" val="0"/>
+              </a:ext>
+            </a:extLst>
+          </a:blip>
+          <a:stretch>
+            <a:fillRect/>
+          </a:stretch>
+        </p:blipFill>
+        <p:spPr>
+          <a:xfrm>
+            <a:off x="2829943" y="3670957"/>
+            <a:ext cx="2303166" cy="347793"/>
+          </a:xfrm>
+          <a:prstGeom prst="rect">
+            <a:avLst/>
+          </a:prstGeom>
+        </p:spPr>
+      </p:pic>
     </p:spTree>
     <p:extLst>
       <p:ext uri="{BB962C8B-B14F-4D97-AF65-F5344CB8AC3E}">
-        <p14:creationId xmlns:p14="http://schemas.microsoft.com/office/powerpoint/2010/main" val="1195912630"/>
+        <p14:creationId xmlns:p14="http://schemas.microsoft.com/office/powerpoint/2010/main" val="747806235"/>
       </p:ext>
     </p:extLst>
   </p:cSld>
@@ -2599,7 +2765,7 @@
           <a:p>
             <a:fld id="{0F78D9C4-20C1-4B15-A116-16DC77AD9A1E}" type="datetime1">
               <a:rPr lang="ko-KR" altLang="en-US" smtClean="0"/>
-              <a:t>2026-01-06</a:t>
+              <a:t>2026-01-07</a:t>
             </a:fld>
             <a:endParaRPr lang="ko-KR" altLang="en-US"/>
           </a:p>
@@ -2842,7 +3008,7 @@
           <a:p>
             <a:fld id="{0F78D9C4-20C1-4B15-A116-16DC77AD9A1E}" type="datetime1">
               <a:rPr lang="ko-KR" altLang="en-US" smtClean="0"/>
-              <a:t>2026-01-06</a:t>
+              <a:t>2026-01-07</a:t>
             </a:fld>
             <a:endParaRPr lang="ko-KR" altLang="en-US"/>
           </a:p>
@@ -3278,7 +3444,7 @@
           <a:p>
             <a:fld id="{0F78D9C4-20C1-4B15-A116-16DC77AD9A1E}" type="datetime1">
               <a:rPr lang="ko-KR" altLang="en-US" smtClean="0"/>
-              <a:t>2026-01-06</a:t>
+              <a:t>2026-01-07</a:t>
             </a:fld>
             <a:endParaRPr lang="ko-KR" altLang="en-US"/>
           </a:p>
@@ -3568,7 +3734,7 @@
           <a:p>
             <a:fld id="{0F78D9C4-20C1-4B15-A116-16DC77AD9A1E}" type="datetime1">
               <a:rPr lang="ko-KR" altLang="en-US" smtClean="0"/>
-              <a:t>2026-01-06</a:t>
+              <a:t>2026-01-07</a:t>
             </a:fld>
             <a:endParaRPr lang="ko-KR" altLang="en-US"/>
           </a:p>
@@ -4099,7 +4265,7 @@
           <a:p>
             <a:fld id="{0F78D9C4-20C1-4B15-A116-16DC77AD9A1E}" type="datetime1">
               <a:rPr lang="ko-KR" altLang="en-US" smtClean="0"/>
-              <a:t>2026-01-06</a:t>
+              <a:t>2026-01-07</a:t>
             </a:fld>
             <a:endParaRPr lang="ko-KR" altLang="en-US"/>
           </a:p>
@@ -4453,7 +4619,7 @@
           <a:p>
             <a:fld id="{0F78D9C4-20C1-4B15-A116-16DC77AD9A1E}" type="datetime1">
               <a:rPr lang="ko-KR" altLang="en-US" smtClean="0"/>
-              <a:t>2026-01-06</a:t>
+              <a:t>2026-01-07</a:t>
             </a:fld>
             <a:endParaRPr lang="ko-KR" altLang="en-US"/>
           </a:p>
@@ -4661,7 +4827,7 @@
           <a:p>
             <a:fld id="{0F78D9C4-20C1-4B15-A116-16DC77AD9A1E}" type="datetime1">
               <a:rPr lang="ko-KR" altLang="en-US" smtClean="0"/>
-              <a:t>2026-01-06</a:t>
+              <a:t>2026-01-07</a:t>
             </a:fld>
             <a:endParaRPr lang="ko-KR" altLang="en-US"/>
           </a:p>
@@ -5156,7 +5322,7 @@
           <a:p>
             <a:fld id="{0F78D9C4-20C1-4B15-A116-16DC77AD9A1E}" type="datetime1">
               <a:rPr lang="ko-KR" altLang="en-US" smtClean="0"/>
-              <a:t>2026-01-06</a:t>
+              <a:t>2026-01-07</a:t>
             </a:fld>
             <a:endParaRPr lang="ko-KR" altLang="en-US"/>
           </a:p>
@@ -5639,7 +5805,7 @@
           <a:p>
             <a:fld id="{0F78D9C4-20C1-4B15-A116-16DC77AD9A1E}" type="datetime1">
               <a:rPr lang="ko-KR" altLang="en-US" smtClean="0"/>
-              <a:t>2026-01-06</a:t>
+              <a:t>2026-01-07</a:t>
             </a:fld>
             <a:endParaRPr lang="ko-KR" altLang="en-US"/>
           </a:p>
@@ -6005,7 +6171,7 @@
           <a:p>
             <a:fld id="{0F78D9C4-20C1-4B15-A116-16DC77AD9A1E}" type="datetime1">
               <a:rPr lang="ko-KR" altLang="en-US" smtClean="0"/>
-              <a:t>2026-01-06</a:t>
+              <a:t>2026-01-07</a:t>
             </a:fld>
             <a:endParaRPr lang="ko-KR" altLang="en-US"/>
           </a:p>

--- a/material/5_AI/02_AI 학습을 위한 기초 수학.pptx
+++ b/material/5_AI/02_AI 학습을 위한 기초 수학.pptx
@@ -45,11 +45,6 @@
       <p:font typeface="맑은 고딕" panose="020B0503020000020004" pitchFamily="50" charset="-127"/>
       <p:regular r:id="rId20"/>
       <p:bold r:id="rId21"/>
-    </p:embeddedFont>
-    <p:embeddedFont>
-      <p:font typeface="메이플스토리" panose="02000300000000000000" pitchFamily="2" charset="-127"/>
-      <p:regular r:id="rId22"/>
-      <p:bold r:id="rId23"/>
     </p:embeddedFont>
   </p:embeddedFontLst>
   <p:defaultTextStyle>
@@ -251,7 +246,7 @@
           <a:p>
             <a:fld id="{2EF3F159-7250-4DD4-91C2-13B35D56E1AF}" type="datetimeFigureOut">
               <a:rPr lang="ko-KR" altLang="en-US" smtClean="0"/>
-              <a:t>2026-01-07</a:t>
+              <a:t>2026-01-12</a:t>
             </a:fld>
             <a:endParaRPr lang="ko-KR" altLang="en-US"/>
           </a:p>
@@ -953,7 +948,7 @@
           <a:p>
             <a:fld id="{9D9DC021-A0A2-48FA-9844-867A974E57AD}" type="datetime1">
               <a:rPr lang="ko-KR" altLang="en-US" smtClean="0"/>
-              <a:t>2026-01-07</a:t>
+              <a:t>2026-01-12</a:t>
             </a:fld>
             <a:endParaRPr lang="ko-KR" altLang="en-US"/>
           </a:p>
@@ -1240,7 +1235,7 @@
           <a:p>
             <a:fld id="{06873DC6-58A2-4EA5-A212-0B6ECD61FDC0}" type="datetime1">
               <a:rPr lang="ko-KR" altLang="en-US" smtClean="0"/>
-              <a:t>2026-01-07</a:t>
+              <a:t>2026-01-12</a:t>
             </a:fld>
             <a:endParaRPr lang="ko-KR" altLang="en-US"/>
           </a:p>
@@ -1415,7 +1410,7 @@
           <a:p>
             <a:fld id="{CECFA89F-766A-4215-9646-99A19D814B36}" type="datetime1">
               <a:rPr lang="ko-KR" altLang="en-US" smtClean="0"/>
-              <a:t>2026-01-07</a:t>
+              <a:t>2026-01-12</a:t>
             </a:fld>
             <a:endParaRPr lang="ko-KR" altLang="en-US"/>
           </a:p>
@@ -1745,7 +1740,7 @@
           <a:p>
             <a:fld id="{CECFA89F-766A-4215-9646-99A19D814B36}" type="datetime1">
               <a:rPr lang="ko-KR" altLang="en-US" smtClean="0"/>
-              <a:t>2026-01-07</a:t>
+              <a:t>2026-01-12</a:t>
             </a:fld>
             <a:endParaRPr lang="ko-KR" altLang="en-US"/>
           </a:p>
@@ -2307,8 +2302,8 @@
           <a:p>
             <a:r>
               <a:rPr lang="en-US" altLang="ko-KR" b="1" dirty="0">
-                <a:latin typeface="메이플스토리" panose="020B0600000101010101" charset="-127"/>
-                <a:ea typeface="메이플스토리" panose="020B0600000101010101" charset="-127"/>
+                <a:latin typeface="Pretendard Medium" panose="02000603000000020004" pitchFamily="50" charset="-127"/>
+                <a:ea typeface="Pretendard Medium" panose="02000603000000020004" pitchFamily="50" charset="-127"/>
               </a:rPr>
               <a:t>x</a:t>
             </a:r>
@@ -2316,8 +2311,8 @@
               <a:solidFill>
                 <a:srgbClr val="0070C0"/>
               </a:solidFill>
-              <a:latin typeface="메이플스토리" panose="020B0600000101010101" charset="-127"/>
-              <a:ea typeface="메이플스토리" panose="020B0600000101010101" charset="-127"/>
+              <a:latin typeface="Pretendard Medium" panose="02000603000000020004" pitchFamily="50" charset="-127"/>
+              <a:ea typeface="Pretendard Medium" panose="02000603000000020004" pitchFamily="50" charset="-127"/>
             </a:endParaRPr>
           </a:p>
         </p:txBody>
@@ -2765,7 +2760,7 @@
           <a:p>
             <a:fld id="{0F78D9C4-20C1-4B15-A116-16DC77AD9A1E}" type="datetime1">
               <a:rPr lang="ko-KR" altLang="en-US" smtClean="0"/>
-              <a:t>2026-01-07</a:t>
+              <a:t>2026-01-12</a:t>
             </a:fld>
             <a:endParaRPr lang="ko-KR" altLang="en-US"/>
           </a:p>
@@ -3008,7 +3003,7 @@
           <a:p>
             <a:fld id="{0F78D9C4-20C1-4B15-A116-16DC77AD9A1E}" type="datetime1">
               <a:rPr lang="ko-KR" altLang="en-US" smtClean="0"/>
-              <a:t>2026-01-07</a:t>
+              <a:t>2026-01-12</a:t>
             </a:fld>
             <a:endParaRPr lang="ko-KR" altLang="en-US"/>
           </a:p>
@@ -3444,7 +3439,7 @@
           <a:p>
             <a:fld id="{0F78D9C4-20C1-4B15-A116-16DC77AD9A1E}" type="datetime1">
               <a:rPr lang="ko-KR" altLang="en-US" smtClean="0"/>
-              <a:t>2026-01-07</a:t>
+              <a:t>2026-01-12</a:t>
             </a:fld>
             <a:endParaRPr lang="ko-KR" altLang="en-US"/>
           </a:p>
@@ -3734,7 +3729,7 @@
           <a:p>
             <a:fld id="{0F78D9C4-20C1-4B15-A116-16DC77AD9A1E}" type="datetime1">
               <a:rPr lang="ko-KR" altLang="en-US" smtClean="0"/>
-              <a:t>2026-01-07</a:t>
+              <a:t>2026-01-12</a:t>
             </a:fld>
             <a:endParaRPr lang="ko-KR" altLang="en-US"/>
           </a:p>
@@ -4095,19 +4090,7 @@
               <a:rPr lang="en-US" altLang="ko-KR" b="1" dirty="0">
                 <a:latin typeface="+mj-ea"/>
               </a:rPr>
-              <a:t>(</a:t>
-            </a:r>
-            <a:r>
-              <a:rPr lang="en-US" altLang="ko-KR" b="1" dirty="0" err="1">
-                <a:latin typeface="+mj-ea"/>
-              </a:rPr>
-              <a:t>Fucntion</a:t>
-            </a:r>
-            <a:r>
-              <a:rPr lang="en-US" altLang="ko-KR" b="1" dirty="0">
-                <a:latin typeface="+mj-ea"/>
-              </a:rPr>
-              <a:t>)</a:t>
+              <a:t>(Function)</a:t>
             </a:r>
             <a:endParaRPr lang="ko-KR" altLang="en-US" b="1" dirty="0">
               <a:latin typeface="+mj-ea"/>
@@ -4265,7 +4248,7 @@
           <a:p>
             <a:fld id="{0F78D9C4-20C1-4B15-A116-16DC77AD9A1E}" type="datetime1">
               <a:rPr lang="ko-KR" altLang="en-US" smtClean="0"/>
-              <a:t>2026-01-07</a:t>
+              <a:t>2026-01-12</a:t>
             </a:fld>
             <a:endParaRPr lang="ko-KR" altLang="en-US"/>
           </a:p>
@@ -4433,19 +4416,7 @@
               <a:rPr lang="en-US" altLang="ko-KR" b="1" dirty="0">
                 <a:latin typeface="+mj-ea"/>
               </a:rPr>
-              <a:t>(</a:t>
-            </a:r>
-            <a:r>
-              <a:rPr lang="en-US" altLang="ko-KR" b="1" dirty="0" err="1">
-                <a:latin typeface="+mj-ea"/>
-              </a:rPr>
-              <a:t>Fucntion</a:t>
-            </a:r>
-            <a:r>
-              <a:rPr lang="en-US" altLang="ko-KR" b="1" dirty="0">
-                <a:latin typeface="+mj-ea"/>
-              </a:rPr>
-              <a:t>)</a:t>
+              <a:t>(Function)</a:t>
             </a:r>
             <a:endParaRPr lang="ko-KR" altLang="en-US" b="1" dirty="0">
               <a:latin typeface="+mj-ea"/>
@@ -4619,7 +4590,7 @@
           <a:p>
             <a:fld id="{0F78D9C4-20C1-4B15-A116-16DC77AD9A1E}" type="datetime1">
               <a:rPr lang="ko-KR" altLang="en-US" smtClean="0"/>
-              <a:t>2026-01-07</a:t>
+              <a:t>2026-01-12</a:t>
             </a:fld>
             <a:endParaRPr lang="ko-KR" altLang="en-US"/>
           </a:p>
@@ -4827,7 +4798,7 @@
           <a:p>
             <a:fld id="{0F78D9C4-20C1-4B15-A116-16DC77AD9A1E}" type="datetime1">
               <a:rPr lang="ko-KR" altLang="en-US" smtClean="0"/>
-              <a:t>2026-01-07</a:t>
+              <a:t>2026-01-12</a:t>
             </a:fld>
             <a:endParaRPr lang="ko-KR" altLang="en-US"/>
           </a:p>
@@ -5322,7 +5293,7 @@
           <a:p>
             <a:fld id="{0F78D9C4-20C1-4B15-A116-16DC77AD9A1E}" type="datetime1">
               <a:rPr lang="ko-KR" altLang="en-US" smtClean="0"/>
-              <a:t>2026-01-07</a:t>
+              <a:t>2026-01-12</a:t>
             </a:fld>
             <a:endParaRPr lang="ko-KR" altLang="en-US"/>
           </a:p>
@@ -5805,7 +5776,7 @@
           <a:p>
             <a:fld id="{0F78D9C4-20C1-4B15-A116-16DC77AD9A1E}" type="datetime1">
               <a:rPr lang="ko-KR" altLang="en-US" smtClean="0"/>
-              <a:t>2026-01-07</a:t>
+              <a:t>2026-01-12</a:t>
             </a:fld>
             <a:endParaRPr lang="ko-KR" altLang="en-US"/>
           </a:p>
@@ -6171,7 +6142,7 @@
           <a:p>
             <a:fld id="{0F78D9C4-20C1-4B15-A116-16DC77AD9A1E}" type="datetime1">
               <a:rPr lang="ko-KR" altLang="en-US" smtClean="0"/>
-              <a:t>2026-01-07</a:t>
+              <a:t>2026-01-12</a:t>
             </a:fld>
             <a:endParaRPr lang="ko-KR" altLang="en-US"/>
           </a:p>
